--- a/Apresentação1.pptx
+++ b/Apresentação1.pptx
@@ -8,6 +8,7 @@
     <p:sldId id="256" r:id="rId2"/>
     <p:sldId id="257" r:id="rId3"/>
     <p:sldId id="258" r:id="rId4"/>
+    <p:sldId id="259" r:id="rId5"/>
   </p:sldIdLst>
   <p:sldSz cx="12192000" cy="6858000"/>
   <p:notesSz cx="6858000" cy="9144000"/>
@@ -836,7 +837,7 @@
           <a:p>
             <a:fld id="{FEFD702A-A8EF-457F-BAD4-84D51B465407}" type="datetimeFigureOut">
               <a:rPr lang="pt-BR" smtClean="0"/>
-              <a:t>13/05/2026</a:t>
+              <a:t>21/05/2026</a:t>
             </a:fld>
             <a:endParaRPr lang="pt-BR"/>
           </a:p>
@@ -1087,7 +1088,7 @@
           <a:p>
             <a:fld id="{FEFD702A-A8EF-457F-BAD4-84D51B465407}" type="datetimeFigureOut">
               <a:rPr lang="pt-BR" smtClean="0"/>
-              <a:t>13/05/2026</a:t>
+              <a:t>21/05/2026</a:t>
             </a:fld>
             <a:endParaRPr lang="pt-BR"/>
           </a:p>
@@ -1401,7 +1402,7 @@
           <a:p>
             <a:fld id="{FEFD702A-A8EF-457F-BAD4-84D51B465407}" type="datetimeFigureOut">
               <a:rPr lang="pt-BR" smtClean="0"/>
-              <a:t>13/05/2026</a:t>
+              <a:t>21/05/2026</a:t>
             </a:fld>
             <a:endParaRPr lang="pt-BR"/>
           </a:p>
@@ -1742,7 +1743,7 @@
           <a:p>
             <a:fld id="{FEFD702A-A8EF-457F-BAD4-84D51B465407}" type="datetimeFigureOut">
               <a:rPr lang="pt-BR" smtClean="0"/>
-              <a:t>13/05/2026</a:t>
+              <a:t>21/05/2026</a:t>
             </a:fld>
             <a:endParaRPr lang="pt-BR"/>
           </a:p>
@@ -2056,7 +2057,7 @@
           <a:p>
             <a:fld id="{FEFD702A-A8EF-457F-BAD4-84D51B465407}" type="datetimeFigureOut">
               <a:rPr lang="pt-BR" smtClean="0"/>
-              <a:t>13/05/2026</a:t>
+              <a:t>21/05/2026</a:t>
             </a:fld>
             <a:endParaRPr lang="pt-BR"/>
           </a:p>
@@ -2449,7 +2450,7 @@
           <a:p>
             <a:fld id="{FEFD702A-A8EF-457F-BAD4-84D51B465407}" type="datetimeFigureOut">
               <a:rPr lang="pt-BR" smtClean="0"/>
-              <a:t>13/05/2026</a:t>
+              <a:t>21/05/2026</a:t>
             </a:fld>
             <a:endParaRPr lang="pt-BR"/>
           </a:p>
@@ -2619,7 +2620,7 @@
           <a:p>
             <a:fld id="{FEFD702A-A8EF-457F-BAD4-84D51B465407}" type="datetimeFigureOut">
               <a:rPr lang="pt-BR" smtClean="0"/>
-              <a:t>13/05/2026</a:t>
+              <a:t>21/05/2026</a:t>
             </a:fld>
             <a:endParaRPr lang="pt-BR"/>
           </a:p>
@@ -2799,7 +2800,7 @@
           <a:p>
             <a:fld id="{FEFD702A-A8EF-457F-BAD4-84D51B465407}" type="datetimeFigureOut">
               <a:rPr lang="pt-BR" smtClean="0"/>
-              <a:t>13/05/2026</a:t>
+              <a:t>21/05/2026</a:t>
             </a:fld>
             <a:endParaRPr lang="pt-BR"/>
           </a:p>
@@ -2975,7 +2976,7 @@
           <a:p>
             <a:fld id="{FEFD702A-A8EF-457F-BAD4-84D51B465407}" type="datetimeFigureOut">
               <a:rPr lang="pt-BR" smtClean="0"/>
-              <a:t>13/05/2026</a:t>
+              <a:t>21/05/2026</a:t>
             </a:fld>
             <a:endParaRPr lang="pt-BR"/>
           </a:p>
@@ -3222,7 +3223,7 @@
           <a:p>
             <a:fld id="{FEFD702A-A8EF-457F-BAD4-84D51B465407}" type="datetimeFigureOut">
               <a:rPr lang="pt-BR" smtClean="0"/>
-              <a:t>13/05/2026</a:t>
+              <a:t>21/05/2026</a:t>
             </a:fld>
             <a:endParaRPr lang="pt-BR"/>
           </a:p>
@@ -3454,7 +3455,7 @@
           <a:p>
             <a:fld id="{FEFD702A-A8EF-457F-BAD4-84D51B465407}" type="datetimeFigureOut">
               <a:rPr lang="pt-BR" smtClean="0"/>
-              <a:t>13/05/2026</a:t>
+              <a:t>21/05/2026</a:t>
             </a:fld>
             <a:endParaRPr lang="pt-BR"/>
           </a:p>
@@ -3828,7 +3829,7 @@
           <a:p>
             <a:fld id="{FEFD702A-A8EF-457F-BAD4-84D51B465407}" type="datetimeFigureOut">
               <a:rPr lang="pt-BR" smtClean="0"/>
-              <a:t>13/05/2026</a:t>
+              <a:t>21/05/2026</a:t>
             </a:fld>
             <a:endParaRPr lang="pt-BR"/>
           </a:p>
@@ -3951,7 +3952,7 @@
           <a:p>
             <a:fld id="{FEFD702A-A8EF-457F-BAD4-84D51B465407}" type="datetimeFigureOut">
               <a:rPr lang="pt-BR" smtClean="0"/>
-              <a:t>13/05/2026</a:t>
+              <a:t>21/05/2026</a:t>
             </a:fld>
             <a:endParaRPr lang="pt-BR"/>
           </a:p>
@@ -4046,7 +4047,7 @@
           <a:p>
             <a:fld id="{FEFD702A-A8EF-457F-BAD4-84D51B465407}" type="datetimeFigureOut">
               <a:rPr lang="pt-BR" smtClean="0"/>
-              <a:t>13/05/2026</a:t>
+              <a:t>21/05/2026</a:t>
             </a:fld>
             <a:endParaRPr lang="pt-BR"/>
           </a:p>
@@ -4301,7 +4302,7 @@
           <a:p>
             <a:fld id="{FEFD702A-A8EF-457F-BAD4-84D51B465407}" type="datetimeFigureOut">
               <a:rPr lang="pt-BR" smtClean="0"/>
-              <a:t>13/05/2026</a:t>
+              <a:t>21/05/2026</a:t>
             </a:fld>
             <a:endParaRPr lang="pt-BR"/>
           </a:p>
@@ -4564,7 +4565,7 @@
           <a:p>
             <a:fld id="{FEFD702A-A8EF-457F-BAD4-84D51B465407}" type="datetimeFigureOut">
               <a:rPr lang="pt-BR" smtClean="0"/>
-              <a:t>13/05/2026</a:t>
+              <a:t>21/05/2026</a:t>
             </a:fld>
             <a:endParaRPr lang="pt-BR"/>
           </a:p>
@@ -5307,7 +5308,7 @@
           <a:p>
             <a:fld id="{FEFD702A-A8EF-457F-BAD4-84D51B465407}" type="datetimeFigureOut">
               <a:rPr lang="pt-BR" smtClean="0"/>
-              <a:t>13/05/2026</a:t>
+              <a:t>21/05/2026</a:t>
             </a:fld>
             <a:endParaRPr lang="pt-BR"/>
           </a:p>
@@ -7331,8 +7332,8 @@
         </p:nvSpPr>
         <p:spPr>
           <a:xfrm>
-            <a:off x="74430" y="931677"/>
-            <a:ext cx="4798993" cy="1278466"/>
+            <a:off x="83207" y="105103"/>
+            <a:ext cx="4798993" cy="2000144"/>
           </a:xfrm>
         </p:spPr>
         <p:txBody>
@@ -7350,8 +7351,59 @@
                 </a:solidFill>
                 <a:latin typeface="Algerian" panose="04020705040A02060702" pitchFamily="82" charset="0"/>
               </a:rPr>
-              <a:t>Imagem ilustrativa da arte</a:t>
-            </a:r>
+              <a:t>Imagem ilustrativa da </a:t>
+            </a:r>
+            <a:r>
+              <a:rPr lang="pt-BR" sz="2400" b="1" dirty="0" smtClean="0">
+                <a:solidFill>
+                  <a:schemeClr val="accent5">
+                    <a:lumMod val="75000"/>
+                  </a:schemeClr>
+                </a:solidFill>
+                <a:latin typeface="Algerian" panose="04020705040A02060702" pitchFamily="82" charset="0"/>
+              </a:rPr>
+              <a:t>arte                 </a:t>
+            </a:r>
+            <a:br>
+              <a:rPr lang="pt-BR" sz="2400" b="1" dirty="0" smtClean="0">
+                <a:solidFill>
+                  <a:schemeClr val="accent5">
+                    <a:lumMod val="75000"/>
+                  </a:schemeClr>
+                </a:solidFill>
+                <a:latin typeface="Algerian" panose="04020705040A02060702" pitchFamily="82" charset="0"/>
+              </a:rPr>
+            </a:br>
+            <a:r>
+              <a:rPr lang="pt-BR" sz="2400" b="1" dirty="0" smtClean="0">
+                <a:solidFill>
+                  <a:schemeClr val="accent5">
+                    <a:lumMod val="75000"/>
+                  </a:schemeClr>
+                </a:solidFill>
+                <a:latin typeface="Algerian" panose="04020705040A02060702" pitchFamily="82" charset="0"/>
+              </a:rPr>
+              <a:t>                </a:t>
+            </a:r>
+            <a:r>
+              <a:rPr lang="pt-BR" sz="3200" b="1" dirty="0" smtClean="0">
+                <a:solidFill>
+                  <a:schemeClr val="accent5">
+                    <a:lumMod val="75000"/>
+                  </a:schemeClr>
+                </a:solidFill>
+                <a:latin typeface="Algerian" panose="04020705040A02060702" pitchFamily="82" charset="0"/>
+              </a:rPr>
+              <a:t>barroca</a:t>
+            </a:r>
+            <a:endParaRPr lang="pt-BR" sz="3200" b="1" dirty="0">
+              <a:solidFill>
+                <a:schemeClr val="accent5">
+                  <a:lumMod val="75000"/>
+                </a:schemeClr>
+              </a:solidFill>
+              <a:latin typeface="Algerian" panose="04020705040A02060702" pitchFamily="82" charset="0"/>
+            </a:endParaRPr>
           </a:p>
         </p:txBody>
       </p:sp>
@@ -7483,7 +7535,7 @@
               <a:t> (</a:t>
             </a:r>
             <a:r>
-              <a:rPr lang="pt-BR" b="1" i="1" u="none" strike="noStrike" dirty="0" err="1">
+              <a:rPr lang="pt-BR" b="1" i="1" u="none" strike="noStrike" dirty="0">
                 <a:solidFill>
                   <a:schemeClr val="accent5">
                     <a:lumMod val="75000"/>
@@ -7846,13 +7898,13 @@
   <p:clrMapOvr>
     <a:masterClrMapping/>
   </p:clrMapOvr>
-  <mc:AlternateContent xmlns:mc="http://schemas.openxmlformats.org/markup-compatibility/2006">
-    <mc:Choice xmlns:p15="http://schemas.microsoft.com/office/powerpoint/2012/main" Requires="p15">
+  <mc:AlternateContent xmlns:mc="http://schemas.openxmlformats.org/markup-compatibility/2006" xmlns:p15="http://schemas.microsoft.com/office/powerpoint/2012/main">
+    <mc:Choice Requires="p15">
       <p:transition xmlns:p14="http://schemas.microsoft.com/office/powerpoint/2010/main" spd="slow" p14:dur="6000">
         <p15:prstTrans prst="curtains"/>
       </p:transition>
     </mc:Choice>
-    <mc:Fallback>
+    <mc:Fallback xmlns="">
       <p:transition spd="slow">
         <p:fade/>
       </p:transition>
@@ -8420,6 +8472,594 @@
 </p:sld>
 </file>
 
+<file path=ppt/slides/slide4.xml><?xml version="1.0" encoding="utf-8"?>
+<p:sld xmlns:a="http://schemas.openxmlformats.org/drawingml/2006/main" xmlns:r="http://schemas.openxmlformats.org/officeDocument/2006/relationships" xmlns:p="http://schemas.openxmlformats.org/presentationml/2006/main">
+  <p:cSld>
+    <p:spTree>
+      <p:nvGrpSpPr>
+        <p:cNvPr id="1" name=""/>
+        <p:cNvGrpSpPr/>
+        <p:nvPr/>
+      </p:nvGrpSpPr>
+      <p:grpSpPr>
+        <a:xfrm>
+          <a:off x="0" y="0"/>
+          <a:ext cx="0" cy="0"/>
+          <a:chOff x="0" y="0"/>
+          <a:chExt cx="0" cy="0"/>
+        </a:xfrm>
+      </p:grpSpPr>
+      <p:sp>
+        <p:nvSpPr>
+          <p:cNvPr id="24" name="Retângulo Arredondado 23"/>
+          <p:cNvSpPr/>
+          <p:nvPr/>
+        </p:nvSpPr>
+        <p:spPr>
+          <a:xfrm>
+            <a:off x="483476" y="2921875"/>
+            <a:ext cx="4077651" cy="3436883"/>
+          </a:xfrm>
+          <a:prstGeom prst="roundRect">
+            <a:avLst/>
+          </a:prstGeom>
+          <a:solidFill>
+            <a:schemeClr val="bg2"/>
+          </a:solidFill>
+        </p:spPr>
+        <p:style>
+          <a:lnRef idx="2">
+            <a:schemeClr val="accent1">
+              <a:shade val="50000"/>
+            </a:schemeClr>
+          </a:lnRef>
+          <a:fillRef idx="1">
+            <a:schemeClr val="accent1"/>
+          </a:fillRef>
+          <a:effectRef idx="0">
+            <a:schemeClr val="accent1"/>
+          </a:effectRef>
+          <a:fontRef idx="minor">
+            <a:schemeClr val="lt1"/>
+          </a:fontRef>
+        </p:style>
+        <p:txBody>
+          <a:bodyPr rtlCol="0" anchor="ctr"/>
+          <a:lstStyle/>
+          <a:p>
+            <a:pPr algn="ctr"/>
+            <a:endParaRPr lang="pt-BR"/>
+          </a:p>
+        </p:txBody>
+      </p:sp>
+      <p:sp>
+        <p:nvSpPr>
+          <p:cNvPr id="20" name="Retângulo 19"/>
+          <p:cNvSpPr/>
+          <p:nvPr/>
+        </p:nvSpPr>
+        <p:spPr>
+          <a:xfrm>
+            <a:off x="5105259" y="1229710"/>
+            <a:ext cx="4932119" cy="4319752"/>
+          </a:xfrm>
+          <a:prstGeom prst="rect">
+            <a:avLst/>
+          </a:prstGeom>
+        </p:spPr>
+        <p:style>
+          <a:lnRef idx="2">
+            <a:schemeClr val="accent1">
+              <a:shade val="50000"/>
+            </a:schemeClr>
+          </a:lnRef>
+          <a:fillRef idx="1">
+            <a:schemeClr val="accent1"/>
+          </a:fillRef>
+          <a:effectRef idx="0">
+            <a:schemeClr val="accent1"/>
+          </a:effectRef>
+          <a:fontRef idx="minor">
+            <a:schemeClr val="lt1"/>
+          </a:fontRef>
+        </p:style>
+        <p:txBody>
+          <a:bodyPr rtlCol="0" anchor="ctr"/>
+          <a:lstStyle/>
+          <a:p>
+            <a:pPr algn="ctr"/>
+            <a:endParaRPr lang="pt-BR"/>
+          </a:p>
+        </p:txBody>
+      </p:sp>
+      <p:sp>
+        <p:nvSpPr>
+          <p:cNvPr id="2" name="Título 1"/>
+          <p:cNvSpPr>
+            <a:spLocks noGrp="1"/>
+          </p:cNvSpPr>
+          <p:nvPr>
+            <p:ph type="title"/>
+          </p:nvPr>
+        </p:nvSpPr>
+        <p:spPr>
+          <a:xfrm>
+            <a:off x="706599" y="514924"/>
+            <a:ext cx="3854528" cy="1278466"/>
+          </a:xfrm>
+        </p:spPr>
+        <p:txBody>
+          <a:bodyPr>
+            <a:normAutofit/>
+          </a:bodyPr>
+          <a:lstStyle/>
+          <a:p>
+            <a:r>
+              <a:rPr lang="pt-BR" b="1" dirty="0" smtClean="0">
+                <a:latin typeface="Algerian" panose="04020705040A02060702" pitchFamily="82" charset="0"/>
+              </a:rPr>
+              <a:t>      </a:t>
+            </a:r>
+            <a:r>
+              <a:rPr lang="pt-BR" dirty="0" smtClean="0">
+                <a:latin typeface="Algerian" panose="04020705040A02060702" pitchFamily="82" charset="0"/>
+              </a:rPr>
+              <a:t>Importância da arte </a:t>
+            </a:r>
+            <a:r>
+              <a:rPr lang="pt-BR" b="1" dirty="0" smtClean="0">
+                <a:latin typeface="Algerian" panose="04020705040A02060702" pitchFamily="82" charset="0"/>
+              </a:rPr>
+              <a:t/>
+            </a:r>
+            <a:br>
+              <a:rPr lang="pt-BR" b="1" dirty="0" smtClean="0">
+                <a:latin typeface="Algerian" panose="04020705040A02060702" pitchFamily="82" charset="0"/>
+              </a:rPr>
+            </a:br>
+            <a:r>
+              <a:rPr lang="pt-BR" sz="2400" b="1" dirty="0">
+                <a:latin typeface="Algerian" panose="04020705040A02060702" pitchFamily="82" charset="0"/>
+              </a:rPr>
+              <a:t> </a:t>
+            </a:r>
+            <a:r>
+              <a:rPr lang="pt-BR" sz="2400" b="1" dirty="0" smtClean="0">
+                <a:latin typeface="Algerian" panose="04020705040A02060702" pitchFamily="82" charset="0"/>
+              </a:rPr>
+              <a:t>               Barroca</a:t>
+            </a:r>
+            <a:endParaRPr lang="pt-BR" b="1" dirty="0">
+              <a:latin typeface="Algerian" panose="04020705040A02060702" pitchFamily="82" charset="0"/>
+            </a:endParaRPr>
+          </a:p>
+        </p:txBody>
+      </p:sp>
+      <p:sp>
+        <p:nvSpPr>
+          <p:cNvPr id="4" name="Espaço Reservado para Texto 3"/>
+          <p:cNvSpPr>
+            <a:spLocks noGrp="1"/>
+          </p:cNvSpPr>
+          <p:nvPr>
+            <p:ph type="body" sz="half" idx="2"/>
+          </p:nvPr>
+        </p:nvSpPr>
+        <p:spPr>
+          <a:xfrm>
+            <a:off x="668791" y="3093621"/>
+            <a:ext cx="3892336" cy="3475345"/>
+          </a:xfrm>
+        </p:spPr>
+        <p:txBody>
+          <a:bodyPr>
+            <a:noAutofit/>
+          </a:bodyPr>
+          <a:lstStyle/>
+          <a:p>
+            <a:r>
+              <a:rPr lang="pt-BR" sz="1800" b="1" dirty="0">
+                <a:solidFill>
+                  <a:schemeClr val="tx1">
+                    <a:lumMod val="75000"/>
+                  </a:schemeClr>
+                </a:solidFill>
+                <a:latin typeface="Algerian" panose="04020705040A02060702" pitchFamily="82" charset="0"/>
+              </a:rPr>
+              <a:t>foi fundamental por atuar como uma poderosa ferramenta de comunicação visual e política no século XVII. Desenvolvida no contexto da Contrarreforma Católica, ela buscava emocionar os fiéis e reafirmar o poder da Igreja por meio de contraste, dramaticidade e riqueza de detalhes</a:t>
+            </a:r>
+          </a:p>
+        </p:txBody>
+      </p:sp>
+      <p:cxnSp>
+        <p:nvCxnSpPr>
+          <p:cNvPr id="5" name="Conector reto 4">
+            <a:extLst>
+              <a:ext uri="{FF2B5EF4-FFF2-40B4-BE49-F238E27FC236}">
+                <a16:creationId xmlns:a16="http://schemas.microsoft.com/office/drawing/2014/main" id="{AB0E0C5F-14C2-405C-B64C-4F89509906DA}"/>
+              </a:ext>
+            </a:extLst>
+          </p:cNvPr>
+          <p:cNvCxnSpPr/>
+          <p:nvPr/>
+        </p:nvCxnSpPr>
+        <p:spPr>
+          <a:xfrm>
+            <a:off x="1250731" y="1387365"/>
+            <a:ext cx="2690648" cy="0"/>
+          </a:xfrm>
+          <a:prstGeom prst="line">
+            <a:avLst/>
+          </a:prstGeom>
+        </p:spPr>
+        <p:style>
+          <a:lnRef idx="3">
+            <a:schemeClr val="dk1"/>
+          </a:lnRef>
+          <a:fillRef idx="0">
+            <a:schemeClr val="dk1"/>
+          </a:fillRef>
+          <a:effectRef idx="2">
+            <a:schemeClr val="dk1"/>
+          </a:effectRef>
+          <a:fontRef idx="minor">
+            <a:schemeClr val="tx1"/>
+          </a:fontRef>
+        </p:style>
+      </p:cxnSp>
+      <p:cxnSp>
+        <p:nvCxnSpPr>
+          <p:cNvPr id="12" name="Conector reto 11">
+            <a:extLst>
+              <a:ext uri="{FF2B5EF4-FFF2-40B4-BE49-F238E27FC236}">
+                <a16:creationId xmlns:a16="http://schemas.microsoft.com/office/drawing/2014/main" id="{AB0E0C5F-14C2-405C-B64C-4F89509906DA}"/>
+              </a:ext>
+            </a:extLst>
+          </p:cNvPr>
+          <p:cNvCxnSpPr/>
+          <p:nvPr/>
+        </p:nvCxnSpPr>
+        <p:spPr>
+          <a:xfrm>
+            <a:off x="2049518" y="1713187"/>
+            <a:ext cx="1397875" cy="0"/>
+          </a:xfrm>
+          <a:prstGeom prst="line">
+            <a:avLst/>
+          </a:prstGeom>
+        </p:spPr>
+        <p:style>
+          <a:lnRef idx="3">
+            <a:schemeClr val="dk1"/>
+          </a:lnRef>
+          <a:fillRef idx="0">
+            <a:schemeClr val="dk1"/>
+          </a:fillRef>
+          <a:effectRef idx="2">
+            <a:schemeClr val="dk1"/>
+          </a:effectRef>
+          <a:fontRef idx="minor">
+            <a:schemeClr val="tx1"/>
+          </a:fontRef>
+        </p:style>
+      </p:cxnSp>
+      <p:pic>
+        <p:nvPicPr>
+          <p:cNvPr id="1026" name="Picture 2" descr="Arte barroca no Brasil – HiSoUR Arte Cultura Exposição"/>
+          <p:cNvPicPr>
+            <a:picLocks noGrp="1" noChangeAspect="1" noChangeArrowheads="1"/>
+          </p:cNvPicPr>
+          <p:nvPr>
+            <p:ph idx="1"/>
+          </p:nvPr>
+        </p:nvPicPr>
+        <p:blipFill>
+          <a:blip r:embed="rId2">
+            <a:extLst>
+              <a:ext uri="{28A0092B-C50C-407E-A947-70E740481C1C}">
+                <a14:useLocalDpi xmlns:a14="http://schemas.microsoft.com/office/drawing/2010/main" val="0"/>
+              </a:ext>
+            </a:extLst>
+          </a:blip>
+          <a:srcRect/>
+          <a:stretch>
+            <a:fillRect/>
+          </a:stretch>
+        </p:blipFill>
+        <p:spPr bwMode="auto">
+          <a:xfrm>
+            <a:off x="5159879" y="1261242"/>
+            <a:ext cx="4822878" cy="4256688"/>
+          </a:xfrm>
+          <a:prstGeom prst="rect">
+            <a:avLst/>
+          </a:prstGeom>
+          <a:noFill/>
+          <a:extLst>
+            <a:ext uri="{909E8E84-426E-40DD-AFC4-6F175D3DCCD1}">
+              <a14:hiddenFill xmlns:a14="http://schemas.microsoft.com/office/drawing/2010/main">
+                <a:solidFill>
+                  <a:srgbClr val="FFFFFF"/>
+                </a:solidFill>
+              </a14:hiddenFill>
+            </a:ext>
+          </a:extLst>
+        </p:spPr>
+      </p:pic>
+    </p:spTree>
+    <p:extLst>
+      <p:ext uri="{BB962C8B-B14F-4D97-AF65-F5344CB8AC3E}">
+        <p14:creationId xmlns:p14="http://schemas.microsoft.com/office/powerpoint/2010/main" val="2489891706"/>
+      </p:ext>
+    </p:extLst>
+  </p:cSld>
+  <p:clrMapOvr>
+    <a:masterClrMapping/>
+  </p:clrMapOvr>
+  <p:timing>
+    <p:tnLst>
+      <p:par>
+        <p:cTn id="1" dur="indefinite" restart="never" nodeType="tmRoot">
+          <p:childTnLst>
+            <p:seq concurrent="1" nextAc="seek">
+              <p:cTn id="2" dur="indefinite" nodeType="mainSeq">
+                <p:childTnLst>
+                  <p:par>
+                    <p:cTn id="3" fill="hold">
+                      <p:stCondLst>
+                        <p:cond delay="indefinite"/>
+                      </p:stCondLst>
+                      <p:childTnLst>
+                        <p:par>
+                          <p:cTn id="4" fill="hold">
+                            <p:stCondLst>
+                              <p:cond delay="0"/>
+                            </p:stCondLst>
+                            <p:childTnLst>
+                              <p:par>
+                                <p:cTn id="5" presetID="21" presetClass="entr" presetSubtype="1" fill="hold" nodeType="clickEffect">
+                                  <p:stCondLst>
+                                    <p:cond delay="0"/>
+                                  </p:stCondLst>
+                                  <p:childTnLst>
+                                    <p:set>
+                                      <p:cBhvr>
+                                        <p:cTn id="6" dur="1" fill="hold">
+                                          <p:stCondLst>
+                                            <p:cond delay="0"/>
+                                          </p:stCondLst>
+                                        </p:cTn>
+                                        <p:tgtEl>
+                                          <p:spTgt spid="5"/>
+                                        </p:tgtEl>
+                                        <p:attrNameLst>
+                                          <p:attrName>style.visibility</p:attrName>
+                                        </p:attrNameLst>
+                                      </p:cBhvr>
+                                      <p:to>
+                                        <p:strVal val="visible"/>
+                                      </p:to>
+                                    </p:set>
+                                    <p:animEffect transition="in" filter="wheel(1)">
+                                      <p:cBhvr>
+                                        <p:cTn id="7" dur="2000"/>
+                                        <p:tgtEl>
+                                          <p:spTgt spid="5"/>
+                                        </p:tgtEl>
+                                      </p:cBhvr>
+                                    </p:animEffect>
+                                  </p:childTnLst>
+                                </p:cTn>
+                              </p:par>
+                            </p:childTnLst>
+                          </p:cTn>
+                        </p:par>
+                      </p:childTnLst>
+                    </p:cTn>
+                  </p:par>
+                  <p:par>
+                    <p:cTn id="8" fill="hold">
+                      <p:stCondLst>
+                        <p:cond delay="indefinite"/>
+                      </p:stCondLst>
+                      <p:childTnLst>
+                        <p:par>
+                          <p:cTn id="9" fill="hold">
+                            <p:stCondLst>
+                              <p:cond delay="0"/>
+                            </p:stCondLst>
+                            <p:childTnLst>
+                              <p:par>
+                                <p:cTn id="10" presetID="16" presetClass="entr" presetSubtype="21" fill="hold" nodeType="clickEffect">
+                                  <p:stCondLst>
+                                    <p:cond delay="0"/>
+                                  </p:stCondLst>
+                                  <p:childTnLst>
+                                    <p:set>
+                                      <p:cBhvr>
+                                        <p:cTn id="11" dur="1" fill="hold">
+                                          <p:stCondLst>
+                                            <p:cond delay="0"/>
+                                          </p:stCondLst>
+                                        </p:cTn>
+                                        <p:tgtEl>
+                                          <p:spTgt spid="12"/>
+                                        </p:tgtEl>
+                                        <p:attrNameLst>
+                                          <p:attrName>style.visibility</p:attrName>
+                                        </p:attrNameLst>
+                                      </p:cBhvr>
+                                      <p:to>
+                                        <p:strVal val="visible"/>
+                                      </p:to>
+                                    </p:set>
+                                    <p:animEffect transition="in" filter="barn(inVertical)">
+                                      <p:cBhvr>
+                                        <p:cTn id="12" dur="500"/>
+                                        <p:tgtEl>
+                                          <p:spTgt spid="12"/>
+                                        </p:tgtEl>
+                                      </p:cBhvr>
+                                    </p:animEffect>
+                                  </p:childTnLst>
+                                </p:cTn>
+                              </p:par>
+                            </p:childTnLst>
+                          </p:cTn>
+                        </p:par>
+                      </p:childTnLst>
+                    </p:cTn>
+                  </p:par>
+                  <p:par>
+                    <p:cTn id="13" fill="hold">
+                      <p:stCondLst>
+                        <p:cond delay="indefinite"/>
+                      </p:stCondLst>
+                      <p:childTnLst>
+                        <p:par>
+                          <p:cTn id="14" fill="hold">
+                            <p:stCondLst>
+                              <p:cond delay="0"/>
+                            </p:stCondLst>
+                            <p:childTnLst>
+                              <p:par>
+                                <p:cTn id="15" presetID="31" presetClass="entr" presetSubtype="0" fill="hold" grpId="0" nodeType="clickEffect">
+                                  <p:stCondLst>
+                                    <p:cond delay="0"/>
+                                  </p:stCondLst>
+                                  <p:childTnLst>
+                                    <p:set>
+                                      <p:cBhvr>
+                                        <p:cTn id="16" dur="1" fill="hold">
+                                          <p:stCondLst>
+                                            <p:cond delay="0"/>
+                                          </p:stCondLst>
+                                        </p:cTn>
+                                        <p:tgtEl>
+                                          <p:spTgt spid="2"/>
+                                        </p:tgtEl>
+                                        <p:attrNameLst>
+                                          <p:attrName>style.visibility</p:attrName>
+                                        </p:attrNameLst>
+                                      </p:cBhvr>
+                                      <p:to>
+                                        <p:strVal val="visible"/>
+                                      </p:to>
+                                    </p:set>
+                                    <p:anim calcmode="lin" valueType="num">
+                                      <p:cBhvr>
+                                        <p:cTn id="17" dur="1000" fill="hold"/>
+                                        <p:tgtEl>
+                                          <p:spTgt spid="2"/>
+                                        </p:tgtEl>
+                                        <p:attrNameLst>
+                                          <p:attrName>ppt_w</p:attrName>
+                                        </p:attrNameLst>
+                                      </p:cBhvr>
+                                      <p:tavLst>
+                                        <p:tav tm="0">
+                                          <p:val>
+                                            <p:fltVal val="0"/>
+                                          </p:val>
+                                        </p:tav>
+                                        <p:tav tm="100000">
+                                          <p:val>
+                                            <p:strVal val="#ppt_w"/>
+                                          </p:val>
+                                        </p:tav>
+                                      </p:tavLst>
+                                    </p:anim>
+                                    <p:anim calcmode="lin" valueType="num">
+                                      <p:cBhvr>
+                                        <p:cTn id="18" dur="1000" fill="hold"/>
+                                        <p:tgtEl>
+                                          <p:spTgt spid="2"/>
+                                        </p:tgtEl>
+                                        <p:attrNameLst>
+                                          <p:attrName>ppt_h</p:attrName>
+                                        </p:attrNameLst>
+                                      </p:cBhvr>
+                                      <p:tavLst>
+                                        <p:tav tm="0">
+                                          <p:val>
+                                            <p:fltVal val="0"/>
+                                          </p:val>
+                                        </p:tav>
+                                        <p:tav tm="100000">
+                                          <p:val>
+                                            <p:strVal val="#ppt_h"/>
+                                          </p:val>
+                                        </p:tav>
+                                      </p:tavLst>
+                                    </p:anim>
+                                    <p:anim calcmode="lin" valueType="num">
+                                      <p:cBhvr>
+                                        <p:cTn id="19" dur="1000" fill="hold"/>
+                                        <p:tgtEl>
+                                          <p:spTgt spid="2"/>
+                                        </p:tgtEl>
+                                        <p:attrNameLst>
+                                          <p:attrName>style.rotation</p:attrName>
+                                        </p:attrNameLst>
+                                      </p:cBhvr>
+                                      <p:tavLst>
+                                        <p:tav tm="0">
+                                          <p:val>
+                                            <p:fltVal val="90"/>
+                                          </p:val>
+                                        </p:tav>
+                                        <p:tav tm="100000">
+                                          <p:val>
+                                            <p:fltVal val="0"/>
+                                          </p:val>
+                                        </p:tav>
+                                      </p:tavLst>
+                                    </p:anim>
+                                    <p:animEffect transition="in" filter="fade">
+                                      <p:cBhvr>
+                                        <p:cTn id="20" dur="1000"/>
+                                        <p:tgtEl>
+                                          <p:spTgt spid="2"/>
+                                        </p:tgtEl>
+                                      </p:cBhvr>
+                                    </p:animEffect>
+                                  </p:childTnLst>
+                                </p:cTn>
+                              </p:par>
+                            </p:childTnLst>
+                          </p:cTn>
+                        </p:par>
+                      </p:childTnLst>
+                    </p:cTn>
+                  </p:par>
+                </p:childTnLst>
+              </p:cTn>
+              <p:prevCondLst>
+                <p:cond evt="onPrev" delay="0">
+                  <p:tgtEl>
+                    <p:sldTgt/>
+                  </p:tgtEl>
+                </p:cond>
+              </p:prevCondLst>
+              <p:nextCondLst>
+                <p:cond evt="onNext" delay="0">
+                  <p:tgtEl>
+                    <p:sldTgt/>
+                  </p:tgtEl>
+                </p:cond>
+              </p:nextCondLst>
+            </p:seq>
+          </p:childTnLst>
+        </p:cTn>
+      </p:par>
+    </p:tnLst>
+    <p:bldLst>
+      <p:bldP spid="2" grpId="0"/>
+    </p:bldLst>
+  </p:timing>
+</p:sld>
+</file>
+
 <file path=ppt/theme/theme1.xml><?xml version="1.0" encoding="utf-8"?>
 <a:theme xmlns:a="http://schemas.openxmlformats.org/drawingml/2006/main" name="Facetado">
   <a:themeElements>
